--- a/assets/pptx/catalog-518.pptx
+++ b/assets/pptx/catalog-518.pptx
@@ -3269,7 +3269,7 @@
                 <a:ea typeface="Ebrima"/>
                 <a:cs typeface="Ebrima"/>
               </a:rPr>
-              <a:t>ሰላም የሞላበት ደስታ የሞላበት ፍቅር የሞላበት እግዚአብሔር ያለበት እግዚአብሔር ያለበት (4x)</a:t>
+              <a:t>ሰላም የሞላበት ደስታ የሞላበት ፍቅር የሞላበት እግዚአብሔር ያለበት እግዚአብሔር ያለበት 4x</a:t>
             </a:r>
           </a:p>
         </p:txBody>
@@ -3403,7 +3403,7 @@
                 <a:ea typeface="Ebrima"/>
                 <a:cs typeface="Ebrima"/>
               </a:rPr>
-              <a:t>(2x) ቃል አገኝ ይሆን ወይ</a:t>
+              <a:t>2x ቃል አገኝ ይሆን ወይ</a:t>
             </a:r>
           </a:p>
         </p:txBody>
@@ -3470,7 +3470,7 @@
                 <a:ea typeface="Ebrima"/>
                 <a:cs typeface="Ebrima"/>
               </a:rPr>
-              <a:t>ለመግለጽ የሚሰማኝን ከአንተ ጋር ስሆን (2x)</a:t>
+              <a:t>ለመግለጽ የሚሰማኝን ከአንተ ጋር ስሆን 2x</a:t>
             </a:r>
           </a:p>
         </p:txBody>
@@ -3738,7 +3738,7 @@
                 <a:ea typeface="Ebrima"/>
                 <a:cs typeface="Ebrima"/>
               </a:rPr>
-              <a:t>(2x)</a:t>
+              <a:t>2x</a:t>
             </a:r>
           </a:p>
         </p:txBody>
@@ -4073,7 +4073,7 @@
                 <a:ea typeface="Ebrima"/>
                 <a:cs typeface="Ebrima"/>
               </a:rPr>
-              <a:t>(4x)</a:t>
+              <a:t>4x</a:t>
             </a:r>
           </a:p>
         </p:txBody>
@@ -4676,7 +4676,7 @@
                 <a:ea typeface="Ebrima"/>
                 <a:cs typeface="Ebrima"/>
               </a:rPr>
-              <a:t>(2x) ቃል አገኝ ይሆን ወይ</a:t>
+              <a:t>2x ቃል አገኝ ይሆን ወይ</a:t>
             </a:r>
           </a:p>
         </p:txBody>
@@ -4743,7 +4743,7 @@
                 <a:ea typeface="Ebrima"/>
                 <a:cs typeface="Ebrima"/>
               </a:rPr>
-              <a:t>አቤት ፍጥረት አይቶ ተደነቀብህ የእኔ ጌታ ኢየሱስ እኩያም የለህ (4x) አቤት ፍጥረት አይቶ ተደነቀብህ የእኔ ጌታ ኢየሱስ እኩያም የለህ (6x)</a:t>
+              <a:t>አቤት ፍጥረት አይቶ ተደነቀብህ የእኔ ጌታ ኢየሱስ እኩያም የለህ 4x አቤት ፍጥረት አይቶ ተደነቀብህ የእኔ ጌታ ኢየሱስ እኩያም የለህ 6x</a:t>
             </a:r>
           </a:p>
         </p:txBody>
@@ -4810,7 +4810,7 @@
                 <a:ea typeface="Ebrima"/>
                 <a:cs typeface="Ebrima"/>
               </a:rPr>
-              <a:t>ለመግለጽ የሚሰማኝን ከአንተ ጋር ስሆን (2x)</a:t>
+              <a:t>ለመግለጽ የሚሰማኝን ከአንተ ጋር ስሆን 2x</a:t>
             </a:r>
           </a:p>
         </p:txBody>
@@ -4877,7 +4877,7 @@
                 <a:ea typeface="Ebrima"/>
                 <a:cs typeface="Ebrima"/>
               </a:rPr>
-              <a:t>ሰላም የሞላበት ደስታ የሞላበት ፍቅር የሞላበት እግዚአብሔር ያለበት ሰላም የሞላበት ደስታ የሞላበት ፍቅር የሞላበት እግዚአብሔር ያለበት እግዚአብሔር ያለበት (4x)</a:t>
+              <a:t>ሰላም የሞላበት ደስታ የሞላበት ፍቅር የሞላበት እግዚአብሔር ያለበት ሰላም የሞላበት ደስታ የሞላበት ፍቅር የሞላበት እግዚአብሔር ያለበት እግዚአብሔር ያለበት 4x</a:t>
             </a:r>
           </a:p>
         </p:txBody>
@@ -5011,7 +5011,7 @@
                 <a:ea typeface="Ebrima"/>
                 <a:cs typeface="Ebrima"/>
               </a:rPr>
-              <a:t>በመንፈስ የሆነ ደስታ ናት (4x)</a:t>
+              <a:t>በመንፈስ የሆነ ደስታ ናት 4x</a:t>
             </a:r>
           </a:p>
         </p:txBody>
